--- a/figures/flowcharts.pptx
+++ b/figures/flowcharts.pptx
@@ -244,7 +244,7 @@
           <a:p>
             <a:fld id="{9048789E-E28A-4AA8-8CE6-09BAE36096DC}" type="datetimeFigureOut">
               <a:rPr lang="en-US" smtClean="0"/>
-              <a:t>12/5/2025</a:t>
+              <a:t>1/8/2026</a:t>
             </a:fld>
             <a:endParaRPr lang="en-US"/>
           </a:p>
@@ -414,7 +414,7 @@
           <a:p>
             <a:fld id="{9048789E-E28A-4AA8-8CE6-09BAE36096DC}" type="datetimeFigureOut">
               <a:rPr lang="en-US" smtClean="0"/>
-              <a:t>12/5/2025</a:t>
+              <a:t>1/8/2026</a:t>
             </a:fld>
             <a:endParaRPr lang="en-US"/>
           </a:p>
@@ -594,7 +594,7 @@
           <a:p>
             <a:fld id="{9048789E-E28A-4AA8-8CE6-09BAE36096DC}" type="datetimeFigureOut">
               <a:rPr lang="en-US" smtClean="0"/>
-              <a:t>12/5/2025</a:t>
+              <a:t>1/8/2026</a:t>
             </a:fld>
             <a:endParaRPr lang="en-US"/>
           </a:p>
@@ -764,7 +764,7 @@
           <a:p>
             <a:fld id="{9048789E-E28A-4AA8-8CE6-09BAE36096DC}" type="datetimeFigureOut">
               <a:rPr lang="en-US" smtClean="0"/>
-              <a:t>12/5/2025</a:t>
+              <a:t>1/8/2026</a:t>
             </a:fld>
             <a:endParaRPr lang="en-US"/>
           </a:p>
@@ -1010,7 +1010,7 @@
           <a:p>
             <a:fld id="{9048789E-E28A-4AA8-8CE6-09BAE36096DC}" type="datetimeFigureOut">
               <a:rPr lang="en-US" smtClean="0"/>
-              <a:t>12/5/2025</a:t>
+              <a:t>1/8/2026</a:t>
             </a:fld>
             <a:endParaRPr lang="en-US"/>
           </a:p>
@@ -1242,7 +1242,7 @@
           <a:p>
             <a:fld id="{9048789E-E28A-4AA8-8CE6-09BAE36096DC}" type="datetimeFigureOut">
               <a:rPr lang="en-US" smtClean="0"/>
-              <a:t>12/5/2025</a:t>
+              <a:t>1/8/2026</a:t>
             </a:fld>
             <a:endParaRPr lang="en-US"/>
           </a:p>
@@ -1609,7 +1609,7 @@
           <a:p>
             <a:fld id="{9048789E-E28A-4AA8-8CE6-09BAE36096DC}" type="datetimeFigureOut">
               <a:rPr lang="en-US" smtClean="0"/>
-              <a:t>12/5/2025</a:t>
+              <a:t>1/8/2026</a:t>
             </a:fld>
             <a:endParaRPr lang="en-US"/>
           </a:p>
@@ -1727,7 +1727,7 @@
           <a:p>
             <a:fld id="{9048789E-E28A-4AA8-8CE6-09BAE36096DC}" type="datetimeFigureOut">
               <a:rPr lang="en-US" smtClean="0"/>
-              <a:t>12/5/2025</a:t>
+              <a:t>1/8/2026</a:t>
             </a:fld>
             <a:endParaRPr lang="en-US"/>
           </a:p>
@@ -1822,7 +1822,7 @@
           <a:p>
             <a:fld id="{9048789E-E28A-4AA8-8CE6-09BAE36096DC}" type="datetimeFigureOut">
               <a:rPr lang="en-US" smtClean="0"/>
-              <a:t>12/5/2025</a:t>
+              <a:t>1/8/2026</a:t>
             </a:fld>
             <a:endParaRPr lang="en-US"/>
           </a:p>
@@ -2099,7 +2099,7 @@
           <a:p>
             <a:fld id="{9048789E-E28A-4AA8-8CE6-09BAE36096DC}" type="datetimeFigureOut">
               <a:rPr lang="en-US" smtClean="0"/>
-              <a:t>12/5/2025</a:t>
+              <a:t>1/8/2026</a:t>
             </a:fld>
             <a:endParaRPr lang="en-US"/>
           </a:p>
@@ -2356,7 +2356,7 @@
           <a:p>
             <a:fld id="{9048789E-E28A-4AA8-8CE6-09BAE36096DC}" type="datetimeFigureOut">
               <a:rPr lang="en-US" smtClean="0"/>
-              <a:t>12/5/2025</a:t>
+              <a:t>1/8/2026</a:t>
             </a:fld>
             <a:endParaRPr lang="en-US"/>
           </a:p>
@@ -2569,7 +2569,7 @@
           <a:p>
             <a:fld id="{9048789E-E28A-4AA8-8CE6-09BAE36096DC}" type="datetimeFigureOut">
               <a:rPr lang="en-US" smtClean="0"/>
-              <a:t>12/5/2025</a:t>
+              <a:t>1/8/2026</a:t>
             </a:fld>
             <a:endParaRPr lang="en-US"/>
           </a:p>
@@ -5264,7 +5264,7 @@
                   <a:sysClr val="windowText" lastClr="000000"/>
                 </a:solidFill>
               </a:rPr>
-              <a:t>Is the parcel in a planned development district?</a:t>
+              <a:t>Is the parcel in a none-by-right district?</a:t>
             </a:r>
           </a:p>
         </p:txBody>
@@ -5325,7 +5325,7 @@
                   <a:schemeClr val="bg1"/>
                 </a:solidFill>
               </a:rPr>
-              <a:t>Is the parcel where the building meets base district requirements in an overlay district?</a:t>
+              <a:t>Is the parcel in a (relevant) overlay district?</a:t>
             </a:r>
           </a:p>
         </p:txBody>
@@ -5451,7 +5451,7 @@
                   <a:sysClr val="windowText" lastClr="000000"/>
                 </a:solidFill>
               </a:rPr>
-              <a:t>Separate zoning districts into base districts, planned development districts, and overlay districts.</a:t>
+              <a:t>Classify zoning districts as base districts, none-by-right districts, and overlay districts.</a:t>
             </a:r>
           </a:p>
         </p:txBody>
@@ -5960,7 +5960,7 @@
                   <a:schemeClr val="bg1"/>
                 </a:solidFill>
               </a:rPr>
-              <a:t>Is the parcel where the building fails base district requirements in an overlay district?</a:t>
+              <a:t>Is the parcel in a (relevant) overlay district?</a:t>
             </a:r>
           </a:p>
         </p:txBody>
